--- a/tutor-time/after-the-mocks/downloads/After_the_Mocks.pptx
+++ b/tutor-time/after-the-mocks/downloads/After_the_Mocks.pptx
@@ -6713,15 +6713,6 @@
                 <a:spcPts val="0"/>
               </a:spcAft>
             </a:pPr>
-            <a:r>
-              <a:rPr sz="1200" b="0" i="1">
-                <a:solidFill>
-                  <a:srgbClr val="5C6552"/>
-                </a:solidFill>
-                <a:latin typeface="Karla"/>
-              </a:rPr>
-              <a:t>Nothing on the sheet is collected. It is yours.</a:t>
-            </a:r>
           </a:p>
         </p:txBody>
       </p:sp>
@@ -8770,7 +8761,7 @@
                 </a:solidFill>
                 <a:latin typeface="Karla"/>
               </a:rPr>
-              <a:t>Things that feel true. They usually have the word always, never or just in them.</a:t>
+              <a:t>Things that feel true. Watch for words like always, never or just.</a:t>
             </a:r>
           </a:p>
         </p:txBody>

--- a/tutor-time/after-the-mocks/downloads/After_the_Mocks.pptx
+++ b/tutor-time/after-the-mocks/downloads/After_the_Mocks.pptx
@@ -3200,11 +3200,11 @@
               </a:spcAft>
             </a:pPr>
             <a:r>
-              <a:rPr sz="4400" b="1" i="0">
+              <a:rPr sz="4400" b="0" i="0">
                 <a:solidFill>
                   <a:srgbClr val="5A6428"/>
                 </a:solidFill>
-                <a:latin typeface="Libre Caslon Display"/>
+                <a:latin typeface="Georgia"/>
               </a:rPr>
               <a:t>After the Mocks</a:t>
             </a:r>
@@ -3290,7 +3290,7 @@
                 <a:solidFill>
                   <a:srgbClr val="5C6552"/>
                 </a:solidFill>
-                <a:latin typeface="Karla"/>
+                <a:latin typeface="Calibri"/>
               </a:rPr>
               <a:t>A result is information. The story is optional.</a:t>
             </a:r>
@@ -3332,7 +3332,7 @@
                 <a:solidFill>
                   <a:srgbClr val="8B9179"/>
                 </a:solidFill>
-                <a:latin typeface="Karla"/>
+                <a:latin typeface="Calibri"/>
               </a:rPr>
               <a:t>Tutor Time  ·  a lesson for the week after mock results, Year 10 to 13</a:t>
             </a:r>
@@ -3398,7 +3398,7 @@
                 <a:solidFill>
                   <a:srgbClr val="8B9179"/>
                 </a:solidFill>
-                <a:latin typeface="Karla"/>
+                <a:latin typeface="Calibri"/>
               </a:rPr>
               <a:t>The Pastoral Guide</a:t>
             </a:r>
@@ -3440,7 +3440,7 @@
                 <a:solidFill>
                   <a:srgbClr val="8B9179"/>
                 </a:solidFill>
-                <a:latin typeface="Karla"/>
+                <a:latin typeface="Calibri"/>
               </a:rPr>
               <a:t>1 / 14</a:t>
             </a:r>
@@ -3511,61 +3511,6 @@
       </p:sp>
       <p:sp>
         <p:nvSpPr>
-          <p:cNvPr id="3" name="Rounded Rectangle 2"/>
-          <p:cNvSpPr/>
-          <p:nvPr/>
-        </p:nvSpPr>
-        <p:spPr>
-          <a:xfrm>
-            <a:off x="685800" y="548640"/>
-            <a:ext cx="740193" cy="237744"/>
-          </a:xfrm>
-          <a:prstGeom prst="roundRect">
-            <a:avLst>
-              <a:gd name="adj" fmla="val 50000"/>
-            </a:avLst>
-          </a:prstGeom>
-          <a:solidFill>
-            <a:srgbClr val="F3F5E9"/>
-          </a:solidFill>
-          <a:ln>
-            <a:noFill/>
-          </a:ln>
-          <a:effectLst/>
-        </p:spPr>
-        <p:style>
-          <a:lnRef idx="1">
-            <a:schemeClr val="accent1"/>
-          </a:lnRef>
-          <a:fillRef idx="3">
-            <a:schemeClr val="accent1"/>
-          </a:fillRef>
-          <a:effectRef idx="2">
-            <a:schemeClr val="accent1"/>
-          </a:effectRef>
-          <a:fontRef idx="minor">
-            <a:schemeClr val="lt1"/>
-          </a:fontRef>
-        </p:style>
-        <p:txBody>
-          <a:bodyPr rtlCol="0" anchor="ctr" wrap="none" lIns="0" rIns="0" tIns="0" bIns="0"/>
-          <a:lstStyle/>
-          <a:p>
-            <a:pPr algn="ctr"/>
-            <a:r>
-              <a:rPr sz="950" b="1" spc="90">
-                <a:solidFill>
-                  <a:srgbClr val="5A6428"/>
-                </a:solidFill>
-                <a:latin typeface="Karla"/>
-              </a:rPr>
-              <a:t>SWAP</a:t>
-            </a:r>
-          </a:p>
-        </p:txBody>
-      </p:sp>
-      <p:sp>
-        <p:nvSpPr>
           <p:cNvPr id="4" name="TextBox 3"/>
           <p:cNvSpPr txBox="1"/>
           <p:nvPr/>
@@ -3595,11 +3540,11 @@
               </a:spcAft>
             </a:pPr>
             <a:r>
-              <a:rPr sz="3000" b="1" i="0">
+              <a:rPr sz="3000" b="0" i="0">
                 <a:solidFill>
                   <a:srgbClr val="2E3436"/>
                 </a:solidFill>
-                <a:latin typeface="Libre Caslon Display"/>
+                <a:latin typeface="Georgia"/>
               </a:rPr>
               <a:t>Check a fact line that is not yours</a:t>
             </a:r>
@@ -3641,7 +3586,7 @@
                 <a:solidFill>
                   <a:srgbClr val="5C6552"/>
                 </a:solidFill>
-                <a:latin typeface="Karla"/>
+                <a:latin typeface="Calibri"/>
               </a:rPr>
               <a:t>Swap sheets with the person next to you.</a:t>
             </a:r>
@@ -3771,7 +3716,7 @@
                 <a:solidFill>
                   <a:srgbClr val="FFFDF7"/>
                 </a:solidFill>
-                <a:latin typeface="Karla"/>
+                <a:latin typeface="Calibri"/>
               </a:rPr>
               <a:t>1</a:t>
             </a:r>
@@ -3809,11 +3754,11 @@
               </a:spcAft>
             </a:pPr>
             <a:r>
-              <a:rPr sz="1300" b="1" i="0">
+              <a:rPr sz="1300" b="0" i="0">
                 <a:solidFill>
                   <a:srgbClr val="5A6428"/>
                 </a:solidFill>
-                <a:latin typeface="Libre Caslon Display"/>
+                <a:latin typeface="Georgia"/>
               </a:rPr>
               <a:t>Is the fact line a fact?</a:t>
             </a:r>
@@ -3855,7 +3800,7 @@
                 <a:solidFill>
                   <a:srgbClr val="5C6552"/>
                 </a:solidFill>
-                <a:latin typeface="Karla"/>
+                <a:latin typeface="Calibri"/>
               </a:rPr>
               <a:t>Could you check it? If not, it is a story in disguise. Underline the word that gives it away.</a:t>
             </a:r>
@@ -3985,7 +3930,7 @@
                 <a:solidFill>
                   <a:srgbClr val="FFFDF7"/>
                 </a:solidFill>
-                <a:latin typeface="Karla"/>
+                <a:latin typeface="Calibri"/>
               </a:rPr>
               <a:t>2</a:t>
             </a:r>
@@ -4023,11 +3968,11 @@
               </a:spcAft>
             </a:pPr>
             <a:r>
-              <a:rPr sz="1300" b="1" i="0">
+              <a:rPr sz="1300" b="0" i="0">
                 <a:solidFill>
                   <a:srgbClr val="5A6428"/>
                 </a:solidFill>
-                <a:latin typeface="Libre Caslon Display"/>
+                <a:latin typeface="Georgia"/>
               </a:rPr>
               <a:t>Is the first move small enough?</a:t>
             </a:r>
@@ -4069,7 +4014,7 @@
                 <a:solidFill>
                   <a:srgbClr val="5C6552"/>
                 </a:solidFill>
-                <a:latin typeface="Karla"/>
+                <a:latin typeface="Calibri"/>
               </a:rPr>
               <a:t>If it would take more than an hour, write “smaller” next to it.</a:t>
             </a:r>
@@ -4199,7 +4144,7 @@
                 <a:solidFill>
                   <a:srgbClr val="FFFDF7"/>
                 </a:solidFill>
-                <a:latin typeface="Karla"/>
+                <a:latin typeface="Calibri"/>
               </a:rPr>
               <a:t>3</a:t>
             </a:r>
@@ -4237,11 +4182,11 @@
               </a:spcAft>
             </a:pPr>
             <a:r>
-              <a:rPr sz="1300" b="1" i="0">
+              <a:rPr sz="1300" b="0" i="0">
                 <a:solidFill>
                   <a:srgbClr val="5A6428"/>
                 </a:solidFill>
-                <a:latin typeface="Libre Caslon Display"/>
+                <a:latin typeface="Georgia"/>
               </a:rPr>
               <a:t>Would you know when it was done?</a:t>
             </a:r>
@@ -4283,7 +4228,7 @@
                 <a:solidFill>
                   <a:srgbClr val="5C6552"/>
                 </a:solidFill>
-                <a:latin typeface="Karla"/>
+                <a:latin typeface="Calibri"/>
               </a:rPr>
               <a:t>A move you cannot tick off is not a move.</a:t>
             </a:r>
@@ -4325,7 +4270,7 @@
                 <a:solidFill>
                   <a:srgbClr val="5C6552"/>
                 </a:solidFill>
-                <a:latin typeface="Karla"/>
+                <a:latin typeface="Calibri"/>
               </a:rPr>
               <a:t>Hand it back. Change anything that got underlined.</a:t>
             </a:r>
@@ -4391,7 +4336,7 @@
                 <a:solidFill>
                   <a:srgbClr val="8B9179"/>
                 </a:solidFill>
-                <a:latin typeface="Karla"/>
+                <a:latin typeface="Calibri"/>
               </a:rPr>
               <a:t>The Pastoral Guide</a:t>
             </a:r>
@@ -4433,7 +4378,7 @@
                 <a:solidFill>
                   <a:srgbClr val="8B9179"/>
                 </a:solidFill>
-                <a:latin typeface="Karla"/>
+                <a:latin typeface="Calibri"/>
               </a:rPr>
               <a:t>10 / 14</a:t>
             </a:r>
@@ -4504,19 +4449,113 @@
       </p:sp>
       <p:sp>
         <p:nvSpPr>
-          <p:cNvPr id="3" name="Rounded Rectangle 2"/>
+          <p:cNvPr id="4" name="TextBox 3"/>
+          <p:cNvSpPr txBox="1"/>
+          <p:nvPr/>
+        </p:nvSpPr>
+        <p:spPr>
+          <a:xfrm>
+            <a:off x="685800" y="896112"/>
+            <a:ext cx="7772400" cy="365760"/>
+          </a:xfrm>
+          <a:prstGeom prst="rect">
+            <a:avLst/>
+          </a:prstGeom>
+          <a:noFill/>
+        </p:spPr>
+        <p:txBody>
+          <a:bodyPr wrap="square" anchor="t" lIns="0" rIns="0" tIns="0" bIns="0">
+            <a:spAutoFit/>
+          </a:bodyPr>
+          <a:lstStyle/>
+          <a:p>
+            <a:pPr algn="l">
+              <a:lnSpc>
+                <a:spcPct val="125000"/>
+              </a:lnSpc>
+              <a:spcAft>
+                <a:spcPts val="0"/>
+              </a:spcAft>
+            </a:pPr>
+            <a:r>
+              <a:rPr sz="1200" b="1" i="0" spc="120">
+                <a:solidFill>
+                  <a:srgbClr val="D6DBB6"/>
+                </a:solidFill>
+                <a:latin typeface="Calibri"/>
+              </a:rPr>
+              <a:t>Two questions</a:t>
+            </a:r>
+          </a:p>
+        </p:txBody>
+      </p:sp>
+      <p:sp>
+        <p:nvSpPr>
+          <p:cNvPr id="5" name="TextBox 4"/>
+          <p:cNvSpPr txBox="1"/>
+          <p:nvPr/>
+        </p:nvSpPr>
+        <p:spPr>
+          <a:xfrm>
+            <a:off x="548640" y="1389888"/>
+            <a:ext cx="8046720" cy="1463040"/>
+          </a:xfrm>
+          <a:prstGeom prst="rect">
+            <a:avLst/>
+          </a:prstGeom>
+          <a:noFill/>
+        </p:spPr>
+        <p:txBody>
+          <a:bodyPr wrap="square" anchor="t" lIns="0" rIns="0" tIns="0" bIns="0">
+            <a:spAutoFit/>
+          </a:bodyPr>
+          <a:lstStyle/>
+          <a:p>
+            <a:pPr algn="ctr">
+              <a:lnSpc>
+                <a:spcPct val="114000"/>
+              </a:lnSpc>
+              <a:spcAft>
+                <a:spcPts val="0"/>
+              </a:spcAft>
+            </a:pPr>
+            <a:r>
+              <a:rPr sz="2800" b="0" i="0">
+                <a:solidFill>
+                  <a:srgbClr val="FFFDF7"/>
+                </a:solidFill>
+                <a:latin typeface="Georgia"/>
+              </a:rPr>
+              <a:t>Who is a mock result for?</a:t>
+            </a:r>
+            <a:br>
+              <a:rPr lang="en-GB"/>
+            </a:br>
+            <a:r>
+              <a:rPr sz="2800" b="0" i="0">
+                <a:solidFill>
+                  <a:srgbClr val="FFFDF7"/>
+                </a:solidFill>
+                <a:latin typeface="Georgia"/>
+              </a:rPr>
+              <a:t>And what is a mock actually for?</a:t>
+            </a:r>
+          </a:p>
+        </p:txBody>
+      </p:sp>
+      <p:sp>
+        <p:nvSpPr>
+          <p:cNvPr id="6" name="Rectangle 5"/>
           <p:cNvSpPr/>
           <p:nvPr/>
         </p:nvSpPr>
         <p:spPr>
           <a:xfrm>
-            <a:off x="685800" y="548640"/>
-            <a:ext cx="955431" cy="237744"/>
-          </a:xfrm>
-          <a:prstGeom prst="roundRect">
-            <a:avLst>
-              <a:gd name="adj" fmla="val 50000"/>
-            </a:avLst>
+            <a:off x="4114800" y="3108960"/>
+            <a:ext cx="914400" cy="18288"/>
+          </a:xfrm>
+          <a:prstGeom prst="rect">
+            <a:avLst/>
           </a:prstGeom>
           <a:solidFill>
             <a:srgbClr val="D6DBB6"/>
@@ -4541,155 +4580,6 @@
           </a:fontRef>
         </p:style>
         <p:txBody>
-          <a:bodyPr rtlCol="0" anchor="ctr" wrap="none" lIns="0" rIns="0" tIns="0" bIns="0"/>
-          <a:lstStyle/>
-          <a:p>
-            <a:pPr algn="ctr"/>
-            <a:r>
-              <a:rPr sz="950" b="1" spc="90">
-                <a:solidFill>
-                  <a:srgbClr val="5A6428"/>
-                </a:solidFill>
-                <a:latin typeface="Karla"/>
-              </a:rPr>
-              <a:t>DISCUSS</a:t>
-            </a:r>
-          </a:p>
-        </p:txBody>
-      </p:sp>
-      <p:sp>
-        <p:nvSpPr>
-          <p:cNvPr id="4" name="TextBox 3"/>
-          <p:cNvSpPr txBox="1"/>
-          <p:nvPr/>
-        </p:nvSpPr>
-        <p:spPr>
-          <a:xfrm>
-            <a:off x="685800" y="896112"/>
-            <a:ext cx="7772400" cy="365760"/>
-          </a:xfrm>
-          <a:prstGeom prst="rect">
-            <a:avLst/>
-          </a:prstGeom>
-          <a:noFill/>
-        </p:spPr>
-        <p:txBody>
-          <a:bodyPr wrap="square" anchor="t" lIns="0" rIns="0" tIns="0" bIns="0">
-            <a:spAutoFit/>
-          </a:bodyPr>
-          <a:lstStyle/>
-          <a:p>
-            <a:pPr algn="l">
-              <a:lnSpc>
-                <a:spcPct val="125000"/>
-              </a:lnSpc>
-              <a:spcAft>
-                <a:spcPts val="0"/>
-              </a:spcAft>
-            </a:pPr>
-            <a:r>
-              <a:rPr sz="1200" b="1" i="0" spc="120">
-                <a:solidFill>
-                  <a:srgbClr val="D6DBB6"/>
-                </a:solidFill>
-                <a:latin typeface="Karla"/>
-              </a:rPr>
-              <a:t>Two questions</a:t>
-            </a:r>
-          </a:p>
-        </p:txBody>
-      </p:sp>
-      <p:sp>
-        <p:nvSpPr>
-          <p:cNvPr id="5" name="TextBox 4"/>
-          <p:cNvSpPr txBox="1"/>
-          <p:nvPr/>
-        </p:nvSpPr>
-        <p:spPr>
-          <a:xfrm>
-            <a:off x="548640" y="1389888"/>
-            <a:ext cx="8046720" cy="1463040"/>
-          </a:xfrm>
-          <a:prstGeom prst="rect">
-            <a:avLst/>
-          </a:prstGeom>
-          <a:noFill/>
-        </p:spPr>
-        <p:txBody>
-          <a:bodyPr wrap="square" anchor="t" lIns="0" rIns="0" tIns="0" bIns="0">
-            <a:spAutoFit/>
-          </a:bodyPr>
-          <a:lstStyle/>
-          <a:p>
-            <a:pPr algn="ctr">
-              <a:lnSpc>
-                <a:spcPct val="114000"/>
-              </a:lnSpc>
-              <a:spcAft>
-                <a:spcPts val="0"/>
-              </a:spcAft>
-            </a:pPr>
-            <a:r>
-              <a:rPr sz="2800" b="1" i="0">
-                <a:solidFill>
-                  <a:srgbClr val="FFFDF7"/>
-                </a:solidFill>
-                <a:latin typeface="Libre Caslon Display"/>
-              </a:rPr>
-              <a:t>Who is a mock result for?</a:t>
-            </a:r>
-            <a:br>
-              <a:rPr lang="en-GB"/>
-            </a:br>
-            <a:r>
-              <a:rPr sz="2800" b="1" i="0">
-                <a:solidFill>
-                  <a:srgbClr val="FFFDF7"/>
-                </a:solidFill>
-                <a:latin typeface="Libre Caslon Display"/>
-              </a:rPr>
-              <a:t>And what is a mock actually for?</a:t>
-            </a:r>
-          </a:p>
-        </p:txBody>
-      </p:sp>
-      <p:sp>
-        <p:nvSpPr>
-          <p:cNvPr id="6" name="Rectangle 5"/>
-          <p:cNvSpPr/>
-          <p:nvPr/>
-        </p:nvSpPr>
-        <p:spPr>
-          <a:xfrm>
-            <a:off x="4114800" y="3108960"/>
-            <a:ext cx="914400" cy="18288"/>
-          </a:xfrm>
-          <a:prstGeom prst="rect">
-            <a:avLst/>
-          </a:prstGeom>
-          <a:solidFill>
-            <a:srgbClr val="D6DBB6"/>
-          </a:solidFill>
-          <a:ln>
-            <a:noFill/>
-          </a:ln>
-          <a:effectLst/>
-        </p:spPr>
-        <p:style>
-          <a:lnRef idx="1">
-            <a:schemeClr val="accent1"/>
-          </a:lnRef>
-          <a:fillRef idx="3">
-            <a:schemeClr val="accent1"/>
-          </a:fillRef>
-          <a:effectRef idx="2">
-            <a:schemeClr val="accent1"/>
-          </a:effectRef>
-          <a:fontRef idx="minor">
-            <a:schemeClr val="lt1"/>
-          </a:fontRef>
-        </p:style>
-        <p:txBody>
           <a:bodyPr rtlCol="0" anchor="ctr"/>
           <a:lstStyle/>
           <a:p>
@@ -4732,7 +4622,7 @@
                 <a:solidFill>
                   <a:srgbClr val="D6DBB6"/>
                 </a:solidFill>
-                <a:latin typeface="Karla"/>
+                <a:latin typeface="Calibri"/>
               </a:rPr>
               <a:t>Take one at a time. The second one has a better answer than most people give it.</a:t>
             </a:r>
@@ -4798,7 +4688,7 @@
                 <a:solidFill>
                   <a:srgbClr val="D6DBB6"/>
                 </a:solidFill>
-                <a:latin typeface="Karla"/>
+                <a:latin typeface="Calibri"/>
               </a:rPr>
               <a:t>The Pastoral Guide</a:t>
             </a:r>
@@ -4840,7 +4730,7 @@
                 <a:solidFill>
                   <a:srgbClr val="D6DBB6"/>
                 </a:solidFill>
-                <a:latin typeface="Karla"/>
+                <a:latin typeface="Calibri"/>
               </a:rPr>
               <a:t>11 / 14</a:t>
             </a:r>
@@ -4957,7 +4847,7 @@
                 <a:solidFill>
                   <a:srgbClr val="5A6428"/>
                 </a:solidFill>
-                <a:latin typeface="Karla"/>
+                <a:latin typeface="Calibri"/>
               </a:rPr>
               <a:t>THIS WEEK</a:t>
             </a:r>
@@ -4995,11 +4885,11 @@
               </a:spcAft>
             </a:pPr>
             <a:r>
-              <a:rPr sz="3000" b="1" i="0">
+              <a:rPr sz="3000" b="0" i="0">
                 <a:solidFill>
                   <a:srgbClr val="2E3436"/>
                 </a:solidFill>
-                <a:latin typeface="Libre Caslon Display"/>
+                <a:latin typeface="Georgia"/>
               </a:rPr>
               <a:t>The week after</a:t>
             </a:r>
@@ -5041,7 +4931,7 @@
                 <a:solidFill>
                   <a:srgbClr val="5C6552"/>
                 </a:solidFill>
-                <a:latin typeface="Karla"/>
+                <a:latin typeface="Calibri"/>
               </a:rPr>
               <a:t>Three things to do before the next set of lessons in that subject.</a:t>
             </a:r>
@@ -5171,7 +5061,7 @@
                 <a:solidFill>
                   <a:srgbClr val="FFFDF7"/>
                 </a:solidFill>
-                <a:latin typeface="Karla"/>
+                <a:latin typeface="Calibri"/>
               </a:rPr>
               <a:t>1</a:t>
             </a:r>
@@ -5209,11 +5099,11 @@
               </a:spcAft>
             </a:pPr>
             <a:r>
-              <a:rPr sz="1300" b="1" i="0">
+              <a:rPr sz="1300" b="0" i="0">
                 <a:solidFill>
                   <a:srgbClr val="5A6428"/>
                 </a:solidFill>
-                <a:latin typeface="Libre Caslon Display"/>
+                <a:latin typeface="Georgia"/>
               </a:rPr>
               <a:t>Find out where the marks went</a:t>
             </a:r>
@@ -5255,7 +5145,7 @@
                 <a:solidFill>
                   <a:srgbClr val="5C6552"/>
                 </a:solidFill>
-                <a:latin typeface="Karla"/>
+                <a:latin typeface="Calibri"/>
               </a:rPr>
               <a:t>Ask for the paper back, or ask which questions cost the most marks.</a:t>
             </a:r>
@@ -5385,7 +5275,7 @@
                 <a:solidFill>
                   <a:srgbClr val="FFFDF7"/>
                 </a:solidFill>
-                <a:latin typeface="Karla"/>
+                <a:latin typeface="Calibri"/>
               </a:rPr>
               <a:t>2</a:t>
             </a:r>
@@ -5423,11 +5313,11 @@
               </a:spcAft>
             </a:pPr>
             <a:r>
-              <a:rPr sz="1300" b="1" i="0">
+              <a:rPr sz="1300" b="0" i="0">
                 <a:solidFill>
                   <a:srgbClr val="5A6428"/>
                 </a:solidFill>
-                <a:latin typeface="Libre Caslon Display"/>
+                <a:latin typeface="Georgia"/>
               </a:rPr>
               <a:t>Make the first move</a:t>
             </a:r>
@@ -5469,7 +5359,7 @@
                 <a:solidFill>
                   <a:srgbClr val="5C6552"/>
                 </a:solidFill>
-                <a:latin typeface="Karla"/>
+                <a:latin typeface="Calibri"/>
               </a:rPr>
               <a:t>The one on your sheet. Under an hour.</a:t>
             </a:r>
@@ -5599,7 +5489,7 @@
                 <a:solidFill>
                   <a:srgbClr val="FFFDF7"/>
                 </a:solidFill>
-                <a:latin typeface="Karla"/>
+                <a:latin typeface="Calibri"/>
               </a:rPr>
               <a:t>3</a:t>
             </a:r>
@@ -5637,11 +5527,11 @@
               </a:spcAft>
             </a:pPr>
             <a:r>
-              <a:rPr sz="1300" b="1" i="0">
+              <a:rPr sz="1300" b="0" i="0">
                 <a:solidFill>
                   <a:srgbClr val="5A6428"/>
                 </a:solidFill>
-                <a:latin typeface="Libre Caslon Display"/>
+                <a:latin typeface="Georgia"/>
               </a:rPr>
               <a:t>Tell one person what your first move is</a:t>
             </a:r>
@@ -5683,7 +5573,7 @@
                 <a:solidFill>
                   <a:srgbClr val="5C6552"/>
                 </a:solidFill>
-                <a:latin typeface="Karla"/>
+                <a:latin typeface="Calibri"/>
               </a:rPr>
               <a:t>Not the result. The move. It is much easier to do a thing somebody knows you are doing.</a:t>
             </a:r>
@@ -5725,7 +5615,7 @@
                 <a:solidFill>
                   <a:srgbClr val="5C6552"/>
                 </a:solidFill>
-                <a:latin typeface="Karla"/>
+                <a:latin typeface="Calibri"/>
               </a:rPr>
               <a:t>A result you have looked at is worth more than a result you have felt.</a:t>
             </a:r>
@@ -5791,7 +5681,7 @@
                 <a:solidFill>
                   <a:srgbClr val="8B9179"/>
                 </a:solidFill>
-                <a:latin typeface="Karla"/>
+                <a:latin typeface="Calibri"/>
               </a:rPr>
               <a:t>The Pastoral Guide</a:t>
             </a:r>
@@ -5833,7 +5723,7 @@
                 <a:solidFill>
                   <a:srgbClr val="8B9179"/>
                 </a:solidFill>
-                <a:latin typeface="Karla"/>
+                <a:latin typeface="Calibri"/>
               </a:rPr>
               <a:t>12 / 14</a:t>
             </a:r>
@@ -5904,61 +5794,6 @@
       </p:sp>
       <p:sp>
         <p:nvSpPr>
-          <p:cNvPr id="3" name="Rounded Rectangle 2"/>
-          <p:cNvSpPr/>
-          <p:nvPr/>
-        </p:nvSpPr>
-        <p:spPr>
-          <a:xfrm>
-            <a:off x="685800" y="548640"/>
-            <a:ext cx="646431" cy="237744"/>
-          </a:xfrm>
-          <a:prstGeom prst="roundRect">
-            <a:avLst>
-              <a:gd name="adj" fmla="val 50000"/>
-            </a:avLst>
-          </a:prstGeom>
-          <a:solidFill>
-            <a:srgbClr val="F3F5E9"/>
-          </a:solidFill>
-          <a:ln>
-            <a:noFill/>
-          </a:ln>
-          <a:effectLst/>
-        </p:spPr>
-        <p:style>
-          <a:lnRef idx="1">
-            <a:schemeClr val="accent1"/>
-          </a:lnRef>
-          <a:fillRef idx="3">
-            <a:schemeClr val="accent1"/>
-          </a:fillRef>
-          <a:effectRef idx="2">
-            <a:schemeClr val="accent1"/>
-          </a:effectRef>
-          <a:fontRef idx="minor">
-            <a:schemeClr val="lt1"/>
-          </a:fontRef>
-        </p:style>
-        <p:txBody>
-          <a:bodyPr rtlCol="0" anchor="ctr" wrap="none" lIns="0" rIns="0" tIns="0" bIns="0"/>
-          <a:lstStyle/>
-          <a:p>
-            <a:pPr algn="ctr"/>
-            <a:r>
-              <a:rPr sz="950" b="1" spc="90">
-                <a:solidFill>
-                  <a:srgbClr val="5A6428"/>
-                </a:solidFill>
-                <a:latin typeface="Karla"/>
-              </a:rPr>
-              <a:t>EXIT</a:t>
-            </a:r>
-          </a:p>
-        </p:txBody>
-      </p:sp>
-      <p:sp>
-        <p:nvSpPr>
           <p:cNvPr id="4" name="TextBox 3"/>
           <p:cNvSpPr txBox="1"/>
           <p:nvPr/>
@@ -5988,11 +5823,11 @@
               </a:spcAft>
             </a:pPr>
             <a:r>
-              <a:rPr sz="3000" b="1" i="0">
+              <a:rPr sz="3000" b="0" i="0">
                 <a:solidFill>
                   <a:srgbClr val="2E3436"/>
                 </a:solidFill>
-                <a:latin typeface="Libre Caslon Display"/>
+                <a:latin typeface="Georgia"/>
               </a:rPr>
               <a:t>One line</a:t>
             </a:r>
@@ -6034,7 +5869,7 @@
                 <a:solidFill>
                   <a:srgbClr val="5C6552"/>
                 </a:solidFill>
-                <a:latin typeface="Karla"/>
+                <a:latin typeface="Calibri"/>
               </a:rPr>
               <a:t>At the bottom of the sheet. Private, not collected.</a:t>
             </a:r>
@@ -6164,7 +5999,7 @@
                 <a:solidFill>
                   <a:srgbClr val="FFFDF7"/>
                 </a:solidFill>
-                <a:latin typeface="Karla"/>
+                <a:latin typeface="Calibri"/>
               </a:rPr>
               <a:t>1</a:t>
             </a:r>
@@ -6202,11 +6037,11 @@
               </a:spcAft>
             </a:pPr>
             <a:r>
-              <a:rPr sz="1300" b="1" i="0">
+              <a:rPr sz="1300" b="0" i="0">
                 <a:solidFill>
                   <a:srgbClr val="5A6428"/>
                 </a:solidFill>
-                <a:latin typeface="Libre Caslon Display"/>
+                <a:latin typeface="Georgia"/>
               </a:rPr>
               <a:t>A friend got your result</a:t>
             </a:r>
@@ -6248,7 +6083,7 @@
                 <a:solidFill>
                   <a:srgbClr val="5C6552"/>
                 </a:solidFill>
-                <a:latin typeface="Karla"/>
+                <a:latin typeface="Calibri"/>
               </a:rPr>
               <a:t>Same mark, same paper. Write the one sentence you would say to them.</a:t>
             </a:r>
@@ -6378,7 +6213,7 @@
                 <a:solidFill>
                   <a:srgbClr val="FFFDF7"/>
                 </a:solidFill>
-                <a:latin typeface="Karla"/>
+                <a:latin typeface="Calibri"/>
               </a:rPr>
               <a:t>2</a:t>
             </a:r>
@@ -6416,11 +6251,11 @@
               </a:spcAft>
             </a:pPr>
             <a:r>
-              <a:rPr sz="1300" b="1" i="0">
+              <a:rPr sz="1300" b="0" i="0">
                 <a:solidFill>
                   <a:srgbClr val="5A6428"/>
                 </a:solidFill>
-                <a:latin typeface="Libre Caslon Display"/>
+                <a:latin typeface="Georgia"/>
               </a:rPr>
               <a:t>Read it back</a:t>
             </a:r>
@@ -6462,7 +6297,7 @@
                 <a:solidFill>
                   <a:srgbClr val="5C6552"/>
                 </a:solidFill>
-                <a:latin typeface="Karla"/>
+                <a:latin typeface="Calibri"/>
               </a:rPr>
               <a:t>It is probably not what you said to yourself on results day.</a:t>
             </a:r>
@@ -6592,7 +6427,7 @@
                 <a:solidFill>
                   <a:srgbClr val="FFFDF7"/>
                 </a:solidFill>
-                <a:latin typeface="Karla"/>
+                <a:latin typeface="Calibri"/>
               </a:rPr>
               <a:t>3</a:t>
             </a:r>
@@ -6630,11 +6465,11 @@
               </a:spcAft>
             </a:pPr>
             <a:r>
-              <a:rPr sz="1300" b="1" i="0">
+              <a:rPr sz="1300" b="0" i="0">
                 <a:solidFill>
                   <a:srgbClr val="5A6428"/>
                 </a:solidFill>
-                <a:latin typeface="Libre Caslon Display"/>
+                <a:latin typeface="Georgia"/>
               </a:rPr>
               <a:t>Keep the sheet</a:t>
             </a:r>
@@ -6676,7 +6511,7 @@
                 <a:solidFill>
                   <a:srgbClr val="5C6552"/>
                 </a:solidFill>
-                <a:latin typeface="Karla"/>
+                <a:latin typeface="Calibri"/>
               </a:rPr>
               <a:t>The first move is on it, and it is due this week.</a:t>
             </a:r>
@@ -6775,7 +6610,7 @@
                 <a:solidFill>
                   <a:srgbClr val="8B9179"/>
                 </a:solidFill>
-                <a:latin typeface="Karla"/>
+                <a:latin typeface="Calibri"/>
               </a:rPr>
               <a:t>The Pastoral Guide</a:t>
             </a:r>
@@ -6817,7 +6652,7 @@
                 <a:solidFill>
                   <a:srgbClr val="8B9179"/>
                 </a:solidFill>
-                <a:latin typeface="Karla"/>
+                <a:latin typeface="Calibri"/>
               </a:rPr>
               <a:t>13 / 14</a:t>
             </a:r>
@@ -6941,11 +6776,11 @@
               </a:spcAft>
             </a:pPr>
             <a:r>
-              <a:rPr sz="3200" b="1" i="0">
+              <a:rPr sz="3200" b="0" i="0">
                 <a:solidFill>
                   <a:srgbClr val="5A6428"/>
                 </a:solidFill>
-                <a:latin typeface="Libre Caslon Display"/>
+                <a:latin typeface="Georgia"/>
               </a:rPr>
               <a:t>Find out where the marks went.</a:t>
             </a:r>
@@ -6987,7 +6822,7 @@
                 <a:solidFill>
                   <a:srgbClr val="5C6552"/>
                 </a:solidFill>
-                <a:latin typeface="Karla"/>
+                <a:latin typeface="Calibri"/>
               </a:rPr>
               <a:t>Then make one move. A mock is a rehearsal, and the story about it is optional.</a:t>
             </a:r>
@@ -7029,7 +6864,7 @@
                 <a:solidFill>
                   <a:srgbClr val="8B9179"/>
                 </a:solidFill>
-                <a:latin typeface="Karla"/>
+                <a:latin typeface="Calibri"/>
               </a:rPr>
               <a:t>The Pastoral Guide  ·  thepastoralguide.com</a:t>
             </a:r>
@@ -7095,7 +6930,7 @@
                 <a:solidFill>
                   <a:srgbClr val="8B9179"/>
                 </a:solidFill>
-                <a:latin typeface="Karla"/>
+                <a:latin typeface="Calibri"/>
               </a:rPr>
               <a:t>The Pastoral Guide</a:t>
             </a:r>
@@ -7137,7 +6972,7 @@
                 <a:solidFill>
                   <a:srgbClr val="8B9179"/>
                 </a:solidFill>
-                <a:latin typeface="Karla"/>
+                <a:latin typeface="Calibri"/>
               </a:rPr>
               <a:t>14 / 14</a:t>
             </a:r>
@@ -7254,7 +7089,7 @@
                 <a:solidFill>
                   <a:srgbClr val="5A6428"/>
                 </a:solidFill>
-                <a:latin typeface="Karla"/>
+                <a:latin typeface="Calibri"/>
               </a:rPr>
               <a:t>TEACHER SLIDE  ·  SKIP IT</a:t>
             </a:r>
@@ -7292,11 +7127,11 @@
               </a:spcAft>
             </a:pPr>
             <a:r>
-              <a:rPr sz="3000" b="1" i="0">
+              <a:rPr sz="3000" b="0" i="0">
                 <a:solidFill>
                   <a:srgbClr val="2E3436"/>
                 </a:solidFill>
-                <a:latin typeface="Libre Caslon Display"/>
+                <a:latin typeface="Georgia"/>
               </a:rPr>
               <a:t>Before the lesson</a:t>
             </a:r>
@@ -7338,7 +7173,7 @@
                 <a:solidFill>
                   <a:srgbClr val="5C6552"/>
                 </a:solidFill>
-                <a:latin typeface="Karla"/>
+                <a:latin typeface="Calibri"/>
               </a:rPr>
               <a:t>One set of cards per table and one sheet per student. Nothing written today is collected.</a:t>
             </a:r>
@@ -7468,7 +7303,7 @@
                 <a:solidFill>
                   <a:srgbClr val="FFFDF7"/>
                 </a:solidFill>
-                <a:latin typeface="Karla"/>
+                <a:latin typeface="Calibri"/>
               </a:rPr>
               <a:t>1</a:t>
             </a:r>
@@ -7506,11 +7341,11 @@
               </a:spcAft>
             </a:pPr>
             <a:r>
-              <a:rPr sz="1300" b="1" i="0">
+              <a:rPr sz="1300" b="0" i="0">
                 <a:solidFill>
                   <a:srgbClr val="5A6428"/>
                 </a:solidFill>
-                <a:latin typeface="Libre Caslon Display"/>
+                <a:latin typeface="Georgia"/>
               </a:rPr>
               <a:t>Cut the cards once, one set per table</a:t>
             </a:r>
@@ -7552,7 +7387,7 @@
                 <a:solidFill>
                   <a:srgbClr val="5C6552"/>
                 </a:solidFill>
-                <a:latin typeface="Karla"/>
+                <a:latin typeface="Calibri"/>
               </a:rPr>
               <a:t>Page 2 of the pack, eight cards. They are sorted on slide 3 before anything is taught.</a:t>
             </a:r>
@@ -7682,7 +7517,7 @@
                 <a:solidFill>
                   <a:srgbClr val="FFFDF7"/>
                 </a:solidFill>
-                <a:latin typeface="Karla"/>
+                <a:latin typeface="Calibri"/>
               </a:rPr>
               <a:t>2</a:t>
             </a:r>
@@ -7720,11 +7555,11 @@
               </a:spcAft>
             </a:pPr>
             <a:r>
-              <a:rPr sz="1300" b="1" i="0">
+              <a:rPr sz="1300" b="0" i="0">
                 <a:solidFill>
                   <a:srgbClr val="5A6428"/>
                 </a:solidFill>
-                <a:latin typeface="Libre Caslon Display"/>
+                <a:latin typeface="Georgia"/>
               </a:rPr>
               <a:t>Print the sheet, one per student</a:t>
             </a:r>
@@ -7766,7 +7601,7 @@
                 <a:solidFill>
                   <a:srgbClr val="5C6552"/>
                 </a:solidFill>
-                <a:latin typeface="Karla"/>
+                <a:latin typeface="Calibri"/>
               </a:rPr>
               <a:t>Page 3. Students need their own mock result in front of them, or a rough memory of it.</a:t>
             </a:r>
@@ -7896,7 +7731,7 @@
                 <a:solidFill>
                   <a:srgbClr val="FFFDF7"/>
                 </a:solidFill>
-                <a:latin typeface="Karla"/>
+                <a:latin typeface="Calibri"/>
               </a:rPr>
               <a:t>3</a:t>
             </a:r>
@@ -7934,11 +7769,11 @@
               </a:spcAft>
             </a:pPr>
             <a:r>
-              <a:rPr sz="1300" b="1" i="0">
+              <a:rPr sz="1300" b="0" i="0">
                 <a:solidFill>
                   <a:srgbClr val="5A6428"/>
                 </a:solidFill>
-                <a:latin typeface="Libre Caslon Display"/>
+                <a:latin typeface="Georgia"/>
               </a:rPr>
               <a:t>Read the safeguarding line on page one</a:t>
             </a:r>
@@ -7980,7 +7815,7 @@
                 <a:solidFill>
                   <a:srgbClr val="5C6552"/>
                 </a:solidFill>
-                <a:latin typeface="Karla"/>
+                <a:latin typeface="Calibri"/>
               </a:rPr>
               <a:t>A bad mock lands on top of other things for some students. The exit slip is private.</a:t>
             </a:r>
@@ -8022,7 +7857,7 @@
                 <a:solidFill>
                   <a:srgbClr val="5C6552"/>
                 </a:solidFill>
-                <a:latin typeface="Karla"/>
+                <a:latin typeface="Calibri"/>
               </a:rPr>
               <a:t>The pack has the hour minute by minute against these slide numbers.</a:t>
             </a:r>
@@ -8088,7 +7923,7 @@
                 <a:solidFill>
                   <a:srgbClr val="8B9179"/>
                 </a:solidFill>
-                <a:latin typeface="Karla"/>
+                <a:latin typeface="Calibri"/>
               </a:rPr>
               <a:t>The Pastoral Guide</a:t>
             </a:r>
@@ -8130,7 +7965,7 @@
                 <a:solidFill>
                   <a:srgbClr val="8B9179"/>
                 </a:solidFill>
-                <a:latin typeface="Karla"/>
+                <a:latin typeface="Calibri"/>
               </a:rPr>
               <a:t>2 / 14</a:t>
             </a:r>
@@ -8201,61 +8036,6 @@
       </p:sp>
       <p:sp>
         <p:nvSpPr>
-          <p:cNvPr id="3" name="Rounded Rectangle 2"/>
-          <p:cNvSpPr/>
-          <p:nvPr/>
-        </p:nvSpPr>
-        <p:spPr>
-          <a:xfrm>
-            <a:off x="685800" y="548640"/>
-            <a:ext cx="966841" cy="237744"/>
-          </a:xfrm>
-          <a:prstGeom prst="roundRect">
-            <a:avLst>
-              <a:gd name="adj" fmla="val 50000"/>
-            </a:avLst>
-          </a:prstGeom>
-          <a:solidFill>
-            <a:srgbClr val="F3F5E9"/>
-          </a:solidFill>
-          <a:ln>
-            <a:noFill/>
-          </a:ln>
-          <a:effectLst/>
-        </p:spPr>
-        <p:style>
-          <a:lnRef idx="1">
-            <a:schemeClr val="accent1"/>
-          </a:lnRef>
-          <a:fillRef idx="3">
-            <a:schemeClr val="accent1"/>
-          </a:fillRef>
-          <a:effectRef idx="2">
-            <a:schemeClr val="accent1"/>
-          </a:effectRef>
-          <a:fontRef idx="minor">
-            <a:schemeClr val="lt1"/>
-          </a:fontRef>
-        </p:style>
-        <p:txBody>
-          <a:bodyPr rtlCol="0" anchor="ctr" wrap="none" lIns="0" rIns="0" tIns="0" bIns="0"/>
-          <a:lstStyle/>
-          <a:p>
-            <a:pPr algn="ctr"/>
-            <a:r>
-              <a:rPr sz="950" b="1" spc="90">
-                <a:solidFill>
-                  <a:srgbClr val="5A6428"/>
-                </a:solidFill>
-                <a:latin typeface="Karla"/>
-              </a:rPr>
-              <a:t>STARTER</a:t>
-            </a:r>
-          </a:p>
-        </p:txBody>
-      </p:sp>
-      <p:sp>
-        <p:nvSpPr>
           <p:cNvPr id="4" name="TextBox 3"/>
           <p:cNvSpPr txBox="1"/>
           <p:nvPr/>
@@ -8285,11 +8065,11 @@
               </a:spcAft>
             </a:pPr>
             <a:r>
-              <a:rPr sz="3000" b="1" i="0">
+              <a:rPr sz="3000" b="0" i="0">
                 <a:solidFill>
                   <a:srgbClr val="2E3436"/>
                 </a:solidFill>
-                <a:latin typeface="Libre Caslon Display"/>
+                <a:latin typeface="Georgia"/>
               </a:rPr>
               <a:t>Sort the cards</a:t>
             </a:r>
@@ -8331,7 +8111,7 @@
                 <a:solidFill>
                   <a:srgbClr val="5C6552"/>
                 </a:solidFill>
-                <a:latin typeface="Karla"/>
+                <a:latin typeface="Calibri"/>
               </a:rPr>
               <a:t>Eight things people say in the week after results. On your table, two piles.</a:t>
             </a:r>
@@ -8461,7 +8241,7 @@
                 <a:solidFill>
                   <a:srgbClr val="FFFDF7"/>
                 </a:solidFill>
-                <a:latin typeface="Karla"/>
+                <a:latin typeface="Calibri"/>
               </a:rPr>
               <a:t>1</a:t>
             </a:r>
@@ -8499,11 +8279,11 @@
               </a:spcAft>
             </a:pPr>
             <a:r>
-              <a:rPr sz="1300" b="1" i="0">
+              <a:rPr sz="1300" b="0" i="0">
                 <a:solidFill>
                   <a:srgbClr val="5A6428"/>
                 </a:solidFill>
-                <a:latin typeface="Libre Caslon Display"/>
+                <a:latin typeface="Georgia"/>
               </a:rPr>
               <a:t>Facts</a:t>
             </a:r>
@@ -8545,7 +8325,7 @@
                 <a:solidFill>
                   <a:srgbClr val="5C6552"/>
                 </a:solidFill>
-                <a:latin typeface="Karla"/>
+                <a:latin typeface="Calibri"/>
               </a:rPr>
               <a:t>Things you could check. A number, a question, a page.</a:t>
             </a:r>
@@ -8675,7 +8455,7 @@
                 <a:solidFill>
                   <a:srgbClr val="FFFDF7"/>
                 </a:solidFill>
-                <a:latin typeface="Karla"/>
+                <a:latin typeface="Calibri"/>
               </a:rPr>
               <a:t>2</a:t>
             </a:r>
@@ -8713,11 +8493,11 @@
               </a:spcAft>
             </a:pPr>
             <a:r>
-              <a:rPr sz="1300" b="1" i="0">
+              <a:rPr sz="1300" b="0" i="0">
                 <a:solidFill>
                   <a:srgbClr val="5A6428"/>
                 </a:solidFill>
-                <a:latin typeface="Libre Caslon Display"/>
+                <a:latin typeface="Georgia"/>
               </a:rPr>
               <a:t>Stories</a:t>
             </a:r>
@@ -8759,7 +8539,7 @@
                 <a:solidFill>
                   <a:srgbClr val="5C6552"/>
                 </a:solidFill>
-                <a:latin typeface="Karla"/>
+                <a:latin typeface="Calibri"/>
               </a:rPr>
               <a:t>Things that feel true. Watch for words like always, never or just.</a:t>
             </a:r>
@@ -8889,7 +8669,7 @@
                 <a:solidFill>
                   <a:srgbClr val="FFFDF7"/>
                 </a:solidFill>
-                <a:latin typeface="Karla"/>
+                <a:latin typeface="Calibri"/>
               </a:rPr>
               <a:t>3</a:t>
             </a:r>
@@ -8927,11 +8707,11 @@
               </a:spcAft>
             </a:pPr>
             <a:r>
-              <a:rPr sz="1300" b="1" i="0">
+              <a:rPr sz="1300" b="0" i="0">
                 <a:solidFill>
                   <a:srgbClr val="5A6428"/>
                 </a:solidFill>
-                <a:latin typeface="Libre Caslon Display"/>
+                <a:latin typeface="Georgia"/>
               </a:rPr>
               <a:t>Disagree out loud</a:t>
             </a:r>
@@ -8973,7 +8753,7 @@
                 <a:solidFill>
                   <a:srgbClr val="5C6552"/>
                 </a:solidFill>
-                <a:latin typeface="Karla"/>
+                <a:latin typeface="Calibri"/>
               </a:rPr>
               <a:t>If your table cannot agree on a card, that card goes on the board.</a:t>
             </a:r>
@@ -9015,7 +8795,7 @@
                 <a:solidFill>
                   <a:srgbClr val="5C6552"/>
                 </a:solidFill>
-                <a:latin typeface="Karla"/>
+                <a:latin typeface="Calibri"/>
               </a:rPr>
               <a:t>Four minutes. Then we look at the ones that caused an argument.</a:t>
             </a:r>
@@ -9081,7 +8861,7 @@
                 <a:solidFill>
                   <a:srgbClr val="8B9179"/>
                 </a:solidFill>
-                <a:latin typeface="Karla"/>
+                <a:latin typeface="Calibri"/>
               </a:rPr>
               <a:t>The Pastoral Guide</a:t>
             </a:r>
@@ -9123,7 +8903,7 @@
                 <a:solidFill>
                   <a:srgbClr val="8B9179"/>
                 </a:solidFill>
-                <a:latin typeface="Karla"/>
+                <a:latin typeface="Calibri"/>
               </a:rPr>
               <a:t>3 / 14</a:t>
             </a:r>
@@ -9194,61 +8974,6 @@
       </p:sp>
       <p:sp>
         <p:nvSpPr>
-          <p:cNvPr id="3" name="Rounded Rectangle 2"/>
-          <p:cNvSpPr/>
-          <p:nvPr/>
-        </p:nvSpPr>
-        <p:spPr>
-          <a:xfrm>
-            <a:off x="685800" y="548640"/>
-            <a:ext cx="1744126" cy="237744"/>
-          </a:xfrm>
-          <a:prstGeom prst="roundRect">
-            <a:avLst>
-              <a:gd name="adj" fmla="val 50000"/>
-            </a:avLst>
-          </a:prstGeom>
-          <a:solidFill>
-            <a:srgbClr val="F3F5E9"/>
-          </a:solidFill>
-          <a:ln>
-            <a:noFill/>
-          </a:ln>
-          <a:effectLst/>
-        </p:spPr>
-        <p:style>
-          <a:lnRef idx="1">
-            <a:schemeClr val="accent1"/>
-          </a:lnRef>
-          <a:fillRef idx="3">
-            <a:schemeClr val="accent1"/>
-          </a:fillRef>
-          <a:effectRef idx="2">
-            <a:schemeClr val="accent1"/>
-          </a:effectRef>
-          <a:fontRef idx="minor">
-            <a:schemeClr val="lt1"/>
-          </a:fontRef>
-        </p:style>
-        <p:txBody>
-          <a:bodyPr rtlCol="0" anchor="ctr" wrap="none" lIns="0" rIns="0" tIns="0" bIns="0"/>
-          <a:lstStyle/>
-          <a:p>
-            <a:pPr algn="ctr"/>
-            <a:r>
-              <a:rPr sz="950" b="1" spc="90">
-                <a:solidFill>
-                  <a:srgbClr val="5A6428"/>
-                </a:solidFill>
-                <a:latin typeface="Karla"/>
-              </a:rPr>
-              <a:t>WHAT YOU SORTED</a:t>
-            </a:r>
-          </a:p>
-        </p:txBody>
-      </p:sp>
-      <p:sp>
-        <p:nvSpPr>
           <p:cNvPr id="4" name="TextBox 3"/>
           <p:cNvSpPr txBox="1"/>
           <p:nvPr/>
@@ -9278,11 +9003,11 @@
               </a:spcAft>
             </a:pPr>
             <a:r>
-              <a:rPr sz="3000" b="1" i="0">
+              <a:rPr sz="3000" b="0" i="0">
                 <a:solidFill>
                   <a:srgbClr val="2E3436"/>
                 </a:solidFill>
-                <a:latin typeface="Libre Caslon Display"/>
+                <a:latin typeface="Georgia"/>
               </a:rPr>
               <a:t>The two piles</a:t>
             </a:r>
@@ -9364,11 +9089,11 @@
               </a:spcAft>
             </a:pPr>
             <a:r>
-              <a:rPr sz="1350" b="1" i="0">
+              <a:rPr sz="1350" b="0" i="0">
                 <a:solidFill>
                   <a:srgbClr val="5A6428"/>
                 </a:solidFill>
-                <a:latin typeface="Libre Caslon Display"/>
+                <a:latin typeface="Georgia"/>
               </a:rPr>
               <a:t>Facts</a:t>
             </a:r>
@@ -9454,7 +9179,7 @@
                 <a:solidFill>
                   <a:srgbClr val="2E3436"/>
                 </a:solidFill>
-                <a:latin typeface="Karla"/>
+                <a:latin typeface="Calibri"/>
               </a:rPr>
               <a:t>I got a 4 in maths.</a:t>
             </a:r>
@@ -9540,7 +9265,7 @@
                 <a:solidFill>
                   <a:srgbClr val="2E3436"/>
                 </a:solidFill>
-                <a:latin typeface="Karla"/>
+                <a:latin typeface="Calibri"/>
               </a:rPr>
               <a:t>I ran out of time on paper two.</a:t>
             </a:r>
@@ -9626,7 +9351,7 @@
                 <a:solidFill>
                   <a:srgbClr val="2E3436"/>
                 </a:solidFill>
-                <a:latin typeface="Karla"/>
+                <a:latin typeface="Calibri"/>
               </a:rPr>
               <a:t>I lost most of the marks on the last two questions.</a:t>
             </a:r>
@@ -9712,7 +9437,7 @@
                 <a:solidFill>
                   <a:srgbClr val="2E3436"/>
                 </a:solidFill>
-                <a:latin typeface="Karla"/>
+                <a:latin typeface="Calibri"/>
               </a:rPr>
               <a:t>The topics I revised were not the ones that came up.</a:t>
             </a:r>
@@ -9794,11 +9519,11 @@
               </a:spcAft>
             </a:pPr>
             <a:r>
-              <a:rPr sz="1350" b="1" i="0">
+              <a:rPr sz="1350" b="0" i="0">
                 <a:solidFill>
                   <a:srgbClr val="5A6428"/>
                 </a:solidFill>
-                <a:latin typeface="Libre Caslon Display"/>
+                <a:latin typeface="Georgia"/>
               </a:rPr>
               <a:t>Stories</a:t>
             </a:r>
@@ -9884,7 +9609,7 @@
                 <a:solidFill>
                   <a:srgbClr val="2E3436"/>
                 </a:solidFill>
-                <a:latin typeface="Karla"/>
+                <a:latin typeface="Calibri"/>
               </a:rPr>
               <a:t>I am just not a maths person.</a:t>
             </a:r>
@@ -9970,7 +9695,7 @@
                 <a:solidFill>
                   <a:srgbClr val="2E3436"/>
                 </a:solidFill>
-                <a:latin typeface="Karla"/>
+                <a:latin typeface="Calibri"/>
               </a:rPr>
               <a:t>Everyone else found it easy.</a:t>
             </a:r>
@@ -10056,7 +9781,7 @@
                 <a:solidFill>
                   <a:srgbClr val="2E3436"/>
                 </a:solidFill>
-                <a:latin typeface="Karla"/>
+                <a:latin typeface="Calibri"/>
               </a:rPr>
               <a:t>There is no point now.</a:t>
             </a:r>
@@ -10142,7 +9867,7 @@
                 <a:solidFill>
                   <a:srgbClr val="2E3436"/>
                 </a:solidFill>
-                <a:latin typeface="Karla"/>
+                <a:latin typeface="Calibri"/>
               </a:rPr>
               <a:t>The teacher has it in for me.</a:t>
             </a:r>
@@ -10184,7 +9909,7 @@
                 <a:solidFill>
                   <a:srgbClr val="5C6552"/>
                 </a:solidFill>
-                <a:latin typeface="Karla"/>
+                <a:latin typeface="Calibri"/>
               </a:rPr>
               <a:t>A story is not a lie. It is a feeling written down as if it were a result.</a:t>
             </a:r>
@@ -10250,7 +9975,7 @@
                 <a:solidFill>
                   <a:srgbClr val="8B9179"/>
                 </a:solidFill>
-                <a:latin typeface="Karla"/>
+                <a:latin typeface="Calibri"/>
               </a:rPr>
               <a:t>The Pastoral Guide</a:t>
             </a:r>
@@ -10292,7 +10017,7 @@
                 <a:solidFill>
                   <a:srgbClr val="8B9179"/>
                 </a:solidFill>
-                <a:latin typeface="Karla"/>
+                <a:latin typeface="Calibri"/>
               </a:rPr>
               <a:t>4 / 14</a:t>
             </a:r>
@@ -10363,61 +10088,6 @@
       </p:sp>
       <p:sp>
         <p:nvSpPr>
-          <p:cNvPr id="3" name="Rounded Rectangle 2"/>
-          <p:cNvSpPr/>
-          <p:nvPr/>
-        </p:nvSpPr>
-        <p:spPr>
-          <a:xfrm>
-            <a:off x="685800" y="548640"/>
-            <a:ext cx="799619" cy="237744"/>
-          </a:xfrm>
-          <a:prstGeom prst="roundRect">
-            <a:avLst>
-              <a:gd name="adj" fmla="val 50000"/>
-            </a:avLst>
-          </a:prstGeom>
-          <a:solidFill>
-            <a:srgbClr val="F3F5E9"/>
-          </a:solidFill>
-          <a:ln>
-            <a:noFill/>
-          </a:ln>
-          <a:effectLst/>
-        </p:spPr>
-        <p:style>
-          <a:lnRef idx="1">
-            <a:schemeClr val="accent1"/>
-          </a:lnRef>
-          <a:fillRef idx="3">
-            <a:schemeClr val="accent1"/>
-          </a:fillRef>
-          <a:effectRef idx="2">
-            <a:schemeClr val="accent1"/>
-          </a:effectRef>
-          <a:fontRef idx="minor">
-            <a:schemeClr val="lt1"/>
-          </a:fontRef>
-        </p:style>
-        <p:txBody>
-          <a:bodyPr rtlCol="0" anchor="ctr" wrap="none" lIns="0" rIns="0" tIns="0" bIns="0"/>
-          <a:lstStyle/>
-          <a:p>
-            <a:pPr algn="ctr"/>
-            <a:r>
-              <a:rPr sz="950" b="1" spc="90">
-                <a:solidFill>
-                  <a:srgbClr val="5A6428"/>
-                </a:solidFill>
-                <a:latin typeface="Karla"/>
-              </a:rPr>
-              <a:t>TEACH</a:t>
-            </a:r>
-          </a:p>
-        </p:txBody>
-      </p:sp>
-      <p:sp>
-        <p:nvSpPr>
           <p:cNvPr id="4" name="TextBox 3"/>
           <p:cNvSpPr txBox="1"/>
           <p:nvPr/>
@@ -10447,11 +10117,11 @@
               </a:spcAft>
             </a:pPr>
             <a:r>
-              <a:rPr sz="3000" b="1" i="0">
+              <a:rPr sz="3000" b="0" i="0">
                 <a:solidFill>
                   <a:srgbClr val="2E3436"/>
                 </a:solidFill>
-                <a:latin typeface="Libre Caslon Display"/>
+                <a:latin typeface="Georgia"/>
               </a:rPr>
               <a:t>A result says three things</a:t>
             </a:r>
@@ -10601,11 +10271,11 @@
               </a:spcAft>
             </a:pPr>
             <a:r>
-              <a:rPr sz="1350" b="1" i="0">
+              <a:rPr sz="1350" b="0" i="0">
                 <a:solidFill>
                   <a:srgbClr val="5A6428"/>
                 </a:solidFill>
-                <a:latin typeface="Libre Caslon Display"/>
+                <a:latin typeface="Georgia"/>
               </a:rPr>
               <a:t>What was tested</a:t>
             </a:r>
@@ -10647,7 +10317,7 @@
                 <a:solidFill>
                   <a:srgbClr val="5C6552"/>
                 </a:solidFill>
-                <a:latin typeface="Karla"/>
+                <a:latin typeface="Calibri"/>
               </a:rPr>
               <a:t>A paper, on a day, on some topics. Not the subject, and not you.</a:t>
             </a:r>
@@ -10797,11 +10467,11 @@
               </a:spcAft>
             </a:pPr>
             <a:r>
-              <a:rPr sz="1350" b="1" i="0">
+              <a:rPr sz="1350" b="0" i="0">
                 <a:solidFill>
                   <a:srgbClr val="5A6428"/>
                 </a:solidFill>
-                <a:latin typeface="Libre Caslon Display"/>
+                <a:latin typeface="Georgia"/>
               </a:rPr>
               <a:t>What you did on it</a:t>
             </a:r>
@@ -10843,7 +10513,7 @@
                 <a:solidFill>
                   <a:srgbClr val="5C6552"/>
                 </a:solidFill>
-                <a:latin typeface="Karla"/>
+                <a:latin typeface="Calibri"/>
               </a:rPr>
               <a:t>Where the marks came from and where they went. The useful part.</a:t>
             </a:r>
@@ -10993,11 +10663,11 @@
               </a:spcAft>
             </a:pPr>
             <a:r>
-              <a:rPr sz="1350" b="1" i="0">
+              <a:rPr sz="1350" b="0" i="0">
                 <a:solidFill>
                   <a:srgbClr val="5A6428"/>
                 </a:solidFill>
-                <a:latin typeface="Libre Caslon Display"/>
+                <a:latin typeface="Georgia"/>
               </a:rPr>
               <a:t>Nothing about next time</a:t>
             </a:r>
@@ -11039,7 +10709,7 @@
                 <a:solidFill>
                   <a:srgbClr val="5C6552"/>
                 </a:solidFill>
-                <a:latin typeface="Karla"/>
+                <a:latin typeface="Calibri"/>
               </a:rPr>
               <a:t>A mock is a rehearsal. The real paper has not been sat yet.</a:t>
             </a:r>
@@ -11081,7 +10751,7 @@
                 <a:solidFill>
                   <a:srgbClr val="5C6552"/>
                 </a:solidFill>
-                <a:latin typeface="Karla"/>
+                <a:latin typeface="Calibri"/>
               </a:rPr>
               <a:t>Everything else you hear yourself saying is the fourth thing.</a:t>
             </a:r>
@@ -11147,7 +10817,7 @@
                 <a:solidFill>
                   <a:srgbClr val="8B9179"/>
                 </a:solidFill>
-                <a:latin typeface="Karla"/>
+                <a:latin typeface="Calibri"/>
               </a:rPr>
               <a:t>The Pastoral Guide</a:t>
             </a:r>
@@ -11189,7 +10859,7 @@
                 <a:solidFill>
                   <a:srgbClr val="8B9179"/>
                 </a:solidFill>
-                <a:latin typeface="Karla"/>
+                <a:latin typeface="Calibri"/>
               </a:rPr>
               <a:t>5 / 14</a:t>
             </a:r>
@@ -11260,61 +10930,6 @@
       </p:sp>
       <p:sp>
         <p:nvSpPr>
-          <p:cNvPr id="3" name="Rounded Rectangle 2"/>
-          <p:cNvSpPr/>
-          <p:nvPr/>
-        </p:nvSpPr>
-        <p:spPr>
-          <a:xfrm>
-            <a:off x="685800" y="548640"/>
-            <a:ext cx="799619" cy="237744"/>
-          </a:xfrm>
-          <a:prstGeom prst="roundRect">
-            <a:avLst>
-              <a:gd name="adj" fmla="val 50000"/>
-            </a:avLst>
-          </a:prstGeom>
-          <a:solidFill>
-            <a:srgbClr val="F3F5E9"/>
-          </a:solidFill>
-          <a:ln>
-            <a:noFill/>
-          </a:ln>
-          <a:effectLst/>
-        </p:spPr>
-        <p:style>
-          <a:lnRef idx="1">
-            <a:schemeClr val="accent1"/>
-          </a:lnRef>
-          <a:fillRef idx="3">
-            <a:schemeClr val="accent1"/>
-          </a:fillRef>
-          <a:effectRef idx="2">
-            <a:schemeClr val="accent1"/>
-          </a:effectRef>
-          <a:fontRef idx="minor">
-            <a:schemeClr val="lt1"/>
-          </a:fontRef>
-        </p:style>
-        <p:txBody>
-          <a:bodyPr rtlCol="0" anchor="ctr" wrap="none" lIns="0" rIns="0" tIns="0" bIns="0"/>
-          <a:lstStyle/>
-          <a:p>
-            <a:pPr algn="ctr"/>
-            <a:r>
-              <a:rPr sz="950" b="1" spc="90">
-                <a:solidFill>
-                  <a:srgbClr val="5A6428"/>
-                </a:solidFill>
-                <a:latin typeface="Karla"/>
-              </a:rPr>
-              <a:t>TEACH</a:t>
-            </a:r>
-          </a:p>
-        </p:txBody>
-      </p:sp>
-      <p:sp>
-        <p:nvSpPr>
           <p:cNvPr id="4" name="TextBox 3"/>
           <p:cNvSpPr txBox="1"/>
           <p:nvPr/>
@@ -11344,11 +10959,11 @@
               </a:spcAft>
             </a:pPr>
             <a:r>
-              <a:rPr sz="3000" b="1" i="0">
+              <a:rPr sz="3000" b="0" i="0">
                 <a:solidFill>
                   <a:srgbClr val="2E3436"/>
                 </a:solidFill>
-                <a:latin typeface="Libre Caslon Display"/>
+                <a:latin typeface="Georgia"/>
               </a:rPr>
               <a:t>The story adds a fourth thing</a:t>
             </a:r>
@@ -11390,7 +11005,7 @@
                 <a:solidFill>
                   <a:srgbClr val="5C6552"/>
                 </a:solidFill>
-                <a:latin typeface="Karla"/>
+                <a:latin typeface="Calibri"/>
               </a:rPr>
               <a:t>What the result says about you, forever.</a:t>
             </a:r>
@@ -11520,7 +11135,7 @@
                 <a:solidFill>
                   <a:srgbClr val="FFFDF7"/>
                 </a:solidFill>
-                <a:latin typeface="Karla"/>
+                <a:latin typeface="Calibri"/>
               </a:rPr>
               <a:t>1</a:t>
             </a:r>
@@ -11558,11 +11173,11 @@
               </a:spcAft>
             </a:pPr>
             <a:r>
-              <a:rPr sz="1300" b="1" i="0">
+              <a:rPr sz="1300" b="0" i="0">
                 <a:solidFill>
                   <a:srgbClr val="5A6428"/>
                 </a:solidFill>
-                <a:latin typeface="Libre Caslon Display"/>
+                <a:latin typeface="Georgia"/>
               </a:rPr>
               <a:t>It turns a paper into a person</a:t>
             </a:r>
@@ -11604,7 +11219,7 @@
                 <a:solidFill>
                   <a:srgbClr val="5C6552"/>
                 </a:solidFill>
-                <a:latin typeface="Karla"/>
+                <a:latin typeface="Calibri"/>
               </a:rPr>
               <a:t>“I got a 4” becomes “I am a 4.”</a:t>
             </a:r>
@@ -11734,7 +11349,7 @@
                 <a:solidFill>
                   <a:srgbClr val="FFFDF7"/>
                 </a:solidFill>
-                <a:latin typeface="Karla"/>
+                <a:latin typeface="Calibri"/>
               </a:rPr>
               <a:t>2</a:t>
             </a:r>
@@ -11772,11 +11387,11 @@
               </a:spcAft>
             </a:pPr>
             <a:r>
-              <a:rPr sz="1300" b="1" i="0">
+              <a:rPr sz="1300" b="0" i="0">
                 <a:solidFill>
                   <a:srgbClr val="5A6428"/>
                 </a:solidFill>
-                <a:latin typeface="Libre Caslon Display"/>
+                <a:latin typeface="Georgia"/>
               </a:rPr>
               <a:t>It turns a day into always</a:t>
             </a:r>
@@ -11818,7 +11433,7 @@
                 <a:solidFill>
                   <a:srgbClr val="5C6552"/>
                 </a:solidFill>
-                <a:latin typeface="Karla"/>
+                <a:latin typeface="Calibri"/>
               </a:rPr>
               <a:t>“I ran out of time” becomes “I always mess up exams.”</a:t>
             </a:r>
@@ -11948,7 +11563,7 @@
                 <a:solidFill>
                   <a:srgbClr val="FFFDF7"/>
                 </a:solidFill>
-                <a:latin typeface="Karla"/>
+                <a:latin typeface="Calibri"/>
               </a:rPr>
               <a:t>3</a:t>
             </a:r>
@@ -11986,11 +11601,11 @@
               </a:spcAft>
             </a:pPr>
             <a:r>
-              <a:rPr sz="1300" b="1" i="0">
+              <a:rPr sz="1300" b="0" i="0">
                 <a:solidFill>
                   <a:srgbClr val="5A6428"/>
                 </a:solidFill>
-                <a:latin typeface="Libre Caslon Display"/>
+                <a:latin typeface="Georgia"/>
               </a:rPr>
               <a:t>It leaves you with a feeling and nothing to do</a:t>
             </a:r>
@@ -12032,7 +11647,7 @@
                 <a:solidFill>
                   <a:srgbClr val="5C6552"/>
                 </a:solidFill>
-                <a:latin typeface="Karla"/>
+                <a:latin typeface="Calibri"/>
               </a:rPr>
               <a:t>A fact points somewhere. A story only points at you.</a:t>
             </a:r>
@@ -12074,7 +11689,7 @@
                 <a:solidFill>
                   <a:srgbClr val="5C6552"/>
                 </a:solidFill>
-                <a:latin typeface="Karla"/>
+                <a:latin typeface="Calibri"/>
               </a:rPr>
               <a:t>You cannot stop the story arriving. You can decide not to write it down.</a:t>
             </a:r>
@@ -12140,7 +11755,7 @@
                 <a:solidFill>
                   <a:srgbClr val="8B9179"/>
                 </a:solidFill>
-                <a:latin typeface="Karla"/>
+                <a:latin typeface="Calibri"/>
               </a:rPr>
               <a:t>The Pastoral Guide</a:t>
             </a:r>
@@ -12182,7 +11797,7 @@
                 <a:solidFill>
                   <a:srgbClr val="8B9179"/>
                 </a:solidFill>
-                <a:latin typeface="Karla"/>
+                <a:latin typeface="Calibri"/>
               </a:rPr>
               <a:t>6 / 14</a:t>
             </a:r>
@@ -12253,61 +11868,6 @@
       </p:sp>
       <p:sp>
         <p:nvSpPr>
-          <p:cNvPr id="3" name="Rounded Rectangle 2"/>
-          <p:cNvSpPr/>
-          <p:nvPr/>
-        </p:nvSpPr>
-        <p:spPr>
-          <a:xfrm>
-            <a:off x="685800" y="548640"/>
-            <a:ext cx="834098" cy="237744"/>
-          </a:xfrm>
-          <a:prstGeom prst="roundRect">
-            <a:avLst>
-              <a:gd name="adj" fmla="val 50000"/>
-            </a:avLst>
-          </a:prstGeom>
-          <a:solidFill>
-            <a:srgbClr val="F3F5E9"/>
-          </a:solidFill>
-          <a:ln>
-            <a:noFill/>
-          </a:ln>
-          <a:effectLst/>
-        </p:spPr>
-        <p:style>
-          <a:lnRef idx="1">
-            <a:schemeClr val="accent1"/>
-          </a:lnRef>
-          <a:fillRef idx="3">
-            <a:schemeClr val="accent1"/>
-          </a:fillRef>
-          <a:effectRef idx="2">
-            <a:schemeClr val="accent1"/>
-          </a:effectRef>
-          <a:fontRef idx="minor">
-            <a:schemeClr val="lt1"/>
-          </a:fontRef>
-        </p:style>
-        <p:txBody>
-          <a:bodyPr rtlCol="0" anchor="ctr" wrap="none" lIns="0" rIns="0" tIns="0" bIns="0"/>
-          <a:lstStyle/>
-          <a:p>
-            <a:pPr algn="ctr"/>
-            <a:r>
-              <a:rPr sz="950" b="1" spc="90">
-                <a:solidFill>
-                  <a:srgbClr val="5A6428"/>
-                </a:solidFill>
-                <a:latin typeface="Karla"/>
-              </a:rPr>
-              <a:t>MODEL</a:t>
-            </a:r>
-          </a:p>
-        </p:txBody>
-      </p:sp>
-      <p:sp>
-        <p:nvSpPr>
           <p:cNvPr id="4" name="TextBox 3"/>
           <p:cNvSpPr txBox="1"/>
           <p:nvPr/>
@@ -12337,11 +11897,11 @@
               </a:spcAft>
             </a:pPr>
             <a:r>
-              <a:rPr sz="3000" b="1" i="0">
+              <a:rPr sz="3000" b="0" i="0">
                 <a:solidFill>
                   <a:srgbClr val="2E3436"/>
                 </a:solidFill>
-                <a:latin typeface="Libre Caslon Display"/>
+                <a:latin typeface="Georgia"/>
               </a:rPr>
               <a:t>One result, two ways</a:t>
             </a:r>
@@ -12423,11 +11983,11 @@
               </a:spcAft>
             </a:pPr>
             <a:r>
-              <a:rPr sz="1350" b="1" i="0">
+              <a:rPr sz="1350" b="0" i="0">
                 <a:solidFill>
                   <a:srgbClr val="5A6428"/>
                 </a:solidFill>
-                <a:latin typeface="Libre Caslon Display"/>
+                <a:latin typeface="Georgia"/>
               </a:rPr>
               <a:t>The story</a:t>
             </a:r>
@@ -12513,7 +12073,7 @@
                 <a:solidFill>
                   <a:srgbClr val="2E3436"/>
                 </a:solidFill>
-                <a:latin typeface="Karla"/>
+                <a:latin typeface="Calibri"/>
               </a:rPr>
               <a:t>I got a 5 in English.</a:t>
             </a:r>
@@ -12599,7 +12159,7 @@
                 <a:solidFill>
                   <a:srgbClr val="2E3436"/>
                 </a:solidFill>
-                <a:latin typeface="Karla"/>
+                <a:latin typeface="Calibri"/>
               </a:rPr>
               <a:t>I am rubbish at essays. I always have been.</a:t>
             </a:r>
@@ -12685,7 +12245,7 @@
                 <a:solidFill>
                   <a:srgbClr val="2E3436"/>
                 </a:solidFill>
-                <a:latin typeface="Karla"/>
+                <a:latin typeface="Calibri"/>
               </a:rPr>
               <a:t>Everyone else is on 7s.</a:t>
             </a:r>
@@ -12771,7 +12331,7 @@
                 <a:solidFill>
                   <a:srgbClr val="2E3436"/>
                 </a:solidFill>
-                <a:latin typeface="Karla"/>
+                <a:latin typeface="Calibri"/>
               </a:rPr>
               <a:t>I might as well not bother in the real one.</a:t>
             </a:r>
@@ -12853,11 +12413,11 @@
               </a:spcAft>
             </a:pPr>
             <a:r>
-              <a:rPr sz="1350" b="1" i="0">
+              <a:rPr sz="1350" b="0" i="0">
                 <a:solidFill>
                   <a:srgbClr val="5A6428"/>
                 </a:solidFill>
-                <a:latin typeface="Libre Caslon Display"/>
+                <a:latin typeface="Georgia"/>
               </a:rPr>
               <a:t>The fact, and a first move</a:t>
             </a:r>
@@ -12943,7 +12503,7 @@
                 <a:solidFill>
                   <a:srgbClr val="2E3436"/>
                 </a:solidFill>
-                <a:latin typeface="Karla"/>
+                <a:latin typeface="Calibri"/>
               </a:rPr>
               <a:t>I got a 5 in English.</a:t>
             </a:r>
@@ -13029,7 +12589,7 @@
                 <a:solidFill>
                   <a:srgbClr val="2E3436"/>
                 </a:solidFill>
-                <a:latin typeface="Karla"/>
+                <a:latin typeface="Calibri"/>
               </a:rPr>
               <a:t>The marks came off for the structure of the second essay.</a:t>
             </a:r>
@@ -13115,7 +12675,7 @@
                 <a:solidFill>
                   <a:srgbClr val="2E3436"/>
                 </a:solidFill>
-                <a:latin typeface="Karla"/>
+                <a:latin typeface="Calibri"/>
               </a:rPr>
               <a:t>The first essay was fine.</a:t>
             </a:r>
@@ -13201,7 +12761,7 @@
                 <a:solidFill>
                   <a:srgbClr val="2E3436"/>
                 </a:solidFill>
-                <a:latin typeface="Karla"/>
+                <a:latin typeface="Calibri"/>
               </a:rPr>
               <a:t>First move: two essay plans this week, checked by somebody.</a:t>
             </a:r>
@@ -13243,7 +12803,7 @@
                 <a:solidFill>
                   <a:srgbClr val="5C6552"/>
                 </a:solidFill>
-                <a:latin typeface="Karla"/>
+                <a:latin typeface="Calibri"/>
               </a:rPr>
               <a:t>Same result. One version has something to do on Tuesday.</a:t>
             </a:r>
@@ -13309,7 +12869,7 @@
                 <a:solidFill>
                   <a:srgbClr val="8B9179"/>
                 </a:solidFill>
-                <a:latin typeface="Karla"/>
+                <a:latin typeface="Calibri"/>
               </a:rPr>
               <a:t>The Pastoral Guide</a:t>
             </a:r>
@@ -13351,7 +12911,7 @@
                 <a:solidFill>
                   <a:srgbClr val="8B9179"/>
                 </a:solidFill>
-                <a:latin typeface="Karla"/>
+                <a:latin typeface="Calibri"/>
               </a:rPr>
               <a:t>7 / 14</a:t>
             </a:r>
@@ -13422,61 +12982,6 @@
       </p:sp>
       <p:sp>
         <p:nvSpPr>
-          <p:cNvPr id="3" name="Rounded Rectangle 2"/>
-          <p:cNvSpPr/>
-          <p:nvPr/>
-        </p:nvSpPr>
-        <p:spPr>
-          <a:xfrm>
-            <a:off x="685800" y="548640"/>
-            <a:ext cx="1101575" cy="237744"/>
-          </a:xfrm>
-          <a:prstGeom prst="roundRect">
-            <a:avLst>
-              <a:gd name="adj" fmla="val 50000"/>
-            </a:avLst>
-          </a:prstGeom>
-          <a:solidFill>
-            <a:srgbClr val="F3F5E9"/>
-          </a:solidFill>
-          <a:ln>
-            <a:noFill/>
-          </a:ln>
-          <a:effectLst/>
-        </p:spPr>
-        <p:style>
-          <a:lnRef idx="1">
-            <a:schemeClr val="accent1"/>
-          </a:lnRef>
-          <a:fillRef idx="3">
-            <a:schemeClr val="accent1"/>
-          </a:fillRef>
-          <a:effectRef idx="2">
-            <a:schemeClr val="accent1"/>
-          </a:effectRef>
-          <a:fontRef idx="minor">
-            <a:schemeClr val="lt1"/>
-          </a:fontRef>
-        </p:style>
-        <p:txBody>
-          <a:bodyPr rtlCol="0" anchor="ctr" wrap="none" lIns="0" rIns="0" tIns="0" bIns="0"/>
-          <a:lstStyle/>
-          <a:p>
-            <a:pPr algn="ctr"/>
-            <a:r>
-              <a:rPr sz="950" b="1" spc="90">
-                <a:solidFill>
-                  <a:srgbClr val="5A6428"/>
-                </a:solidFill>
-                <a:latin typeface="Karla"/>
-              </a:rPr>
-              <a:t>TOGETHER</a:t>
-            </a:r>
-          </a:p>
-        </p:txBody>
-      </p:sp>
-      <p:sp>
-        <p:nvSpPr>
           <p:cNvPr id="4" name="TextBox 3"/>
           <p:cNvSpPr txBox="1"/>
           <p:nvPr/>
@@ -13506,11 +13011,11 @@
               </a:spcAft>
             </a:pPr>
             <a:r>
-              <a:rPr sz="3000" b="1" i="0">
+              <a:rPr sz="3000" b="0" i="0">
                 <a:solidFill>
                   <a:srgbClr val="2E3436"/>
                 </a:solidFill>
-                <a:latin typeface="Libre Caslon Display"/>
+                <a:latin typeface="Georgia"/>
               </a:rPr>
               <a:t>Do one together</a:t>
             </a:r>
@@ -13552,7 +13057,7 @@
                 <a:solidFill>
                   <a:srgbClr val="5C6552"/>
                 </a:solidFill>
-                <a:latin typeface="Karla"/>
+                <a:latin typeface="Calibri"/>
               </a:rPr>
               <a:t>A made-up result on the board. The room turns it into a fact and a first move.</a:t>
             </a:r>
@@ -13682,7 +13187,7 @@
                 <a:solidFill>
                   <a:srgbClr val="FFFDF7"/>
                 </a:solidFill>
-                <a:latin typeface="Karla"/>
+                <a:latin typeface="Calibri"/>
               </a:rPr>
               <a:t>1</a:t>
             </a:r>
@@ -13720,11 +13225,11 @@
               </a:spcAft>
             </a:pPr>
             <a:r>
-              <a:rPr sz="1300" b="1" i="0">
+              <a:rPr sz="1300" b="0" i="0">
                 <a:solidFill>
                   <a:srgbClr val="5A6428"/>
                 </a:solidFill>
-                <a:latin typeface="Libre Caslon Display"/>
+                <a:latin typeface="Georgia"/>
               </a:rPr>
               <a:t>The result</a:t>
             </a:r>
@@ -13766,7 +13271,7 @@
                 <a:solidFill>
                   <a:srgbClr val="5C6552"/>
                 </a:solidFill>
-                <a:latin typeface="Karla"/>
+                <a:latin typeface="Calibri"/>
               </a:rPr>
               <a:t>A 3 in science. Ran out of time on paper one, and lost most marks on the first topic.</a:t>
             </a:r>
@@ -13896,7 +13401,7 @@
                 <a:solidFill>
                   <a:srgbClr val="FFFDF7"/>
                 </a:solidFill>
-                <a:latin typeface="Karla"/>
+                <a:latin typeface="Calibri"/>
               </a:rPr>
               <a:t>2</a:t>
             </a:r>
@@ -13934,11 +13439,11 @@
               </a:spcAft>
             </a:pPr>
             <a:r>
-              <a:rPr sz="1300" b="1" i="0">
+              <a:rPr sz="1300" b="0" i="0">
                 <a:solidFill>
                   <a:srgbClr val="5A6428"/>
                 </a:solidFill>
-                <a:latin typeface="Libre Caslon Display"/>
+                <a:latin typeface="Georgia"/>
               </a:rPr>
               <a:t>The fact line</a:t>
             </a:r>
@@ -13980,7 +13485,7 @@
                 <a:solidFill>
                   <a:srgbClr val="5C6552"/>
                 </a:solidFill>
-                <a:latin typeface="Karla"/>
+                <a:latin typeface="Calibri"/>
               </a:rPr>
               <a:t>Say it out loud until it has no always, never or just in it.</a:t>
             </a:r>
@@ -14110,7 +13615,7 @@
                 <a:solidFill>
                   <a:srgbClr val="FFFDF7"/>
                 </a:solidFill>
-                <a:latin typeface="Karla"/>
+                <a:latin typeface="Calibri"/>
               </a:rPr>
               <a:t>3</a:t>
             </a:r>
@@ -14148,11 +13653,11 @@
               </a:spcAft>
             </a:pPr>
             <a:r>
-              <a:rPr sz="1300" b="1" i="0">
+              <a:rPr sz="1300" b="0" i="0">
                 <a:solidFill>
                   <a:srgbClr val="5A6428"/>
                 </a:solidFill>
-                <a:latin typeface="Libre Caslon Display"/>
+                <a:latin typeface="Georgia"/>
               </a:rPr>
               <a:t>The first move</a:t>
             </a:r>
@@ -14194,7 +13699,7 @@
                 <a:solidFill>
                   <a:srgbClr val="5C6552"/>
                 </a:solidFill>
-                <a:latin typeface="Karla"/>
+                <a:latin typeface="Calibri"/>
               </a:rPr>
               <a:t>Something that takes less than an hour and could happen this week.</a:t>
             </a:r>
@@ -14236,7 +13741,7 @@
                 <a:solidFill>
                   <a:srgbClr val="5C6552"/>
                 </a:solidFill>
-                <a:latin typeface="Karla"/>
+                <a:latin typeface="Calibri"/>
               </a:rPr>
               <a:t>If the first move is “revise more”, it is not a move yet. Make it smaller.</a:t>
             </a:r>
@@ -14302,7 +13807,7 @@
                 <a:solidFill>
                   <a:srgbClr val="8B9179"/>
                 </a:solidFill>
-                <a:latin typeface="Karla"/>
+                <a:latin typeface="Calibri"/>
               </a:rPr>
               <a:t>The Pastoral Guide</a:t>
             </a:r>
@@ -14344,7 +13849,7 @@
                 <a:solidFill>
                   <a:srgbClr val="8B9179"/>
                 </a:solidFill>
-                <a:latin typeface="Karla"/>
+                <a:latin typeface="Calibri"/>
               </a:rPr>
               <a:t>8 / 14</a:t>
             </a:r>
@@ -14415,61 +13920,6 @@
       </p:sp>
       <p:sp>
         <p:nvSpPr>
-          <p:cNvPr id="3" name="Rounded Rectangle 2"/>
-          <p:cNvSpPr/>
-          <p:nvPr/>
-        </p:nvSpPr>
-        <p:spPr>
-          <a:xfrm>
-            <a:off x="685800" y="548640"/>
-            <a:ext cx="1177620" cy="237744"/>
-          </a:xfrm>
-          <a:prstGeom prst="roundRect">
-            <a:avLst>
-              <a:gd name="adj" fmla="val 50000"/>
-            </a:avLst>
-          </a:prstGeom>
-          <a:solidFill>
-            <a:srgbClr val="F3F5E9"/>
-          </a:solidFill>
-          <a:ln>
-            <a:noFill/>
-          </a:ln>
-          <a:effectLst/>
-        </p:spPr>
-        <p:style>
-          <a:lnRef idx="1">
-            <a:schemeClr val="accent1"/>
-          </a:lnRef>
-          <a:fillRef idx="3">
-            <a:schemeClr val="accent1"/>
-          </a:fillRef>
-          <a:effectRef idx="2">
-            <a:schemeClr val="accent1"/>
-          </a:effectRef>
-          <a:fontRef idx="minor">
-            <a:schemeClr val="lt1"/>
-          </a:fontRef>
-        </p:style>
-        <p:txBody>
-          <a:bodyPr rtlCol="0" anchor="ctr" wrap="none" lIns="0" rIns="0" tIns="0" bIns="0"/>
-          <a:lstStyle/>
-          <a:p>
-            <a:pPr algn="ctr"/>
-            <a:r>
-              <a:rPr sz="950" b="1" spc="90">
-                <a:solidFill>
-                  <a:srgbClr val="5A6428"/>
-                </a:solidFill>
-                <a:latin typeface="Karla"/>
-              </a:rPr>
-              <a:t>YOUR TURN</a:t>
-            </a:r>
-          </a:p>
-        </p:txBody>
-      </p:sp>
-      <p:sp>
-        <p:nvSpPr>
           <p:cNvPr id="4" name="TextBox 3"/>
           <p:cNvSpPr txBox="1"/>
           <p:nvPr/>
@@ -14499,11 +13949,11 @@
               </a:spcAft>
             </a:pPr>
             <a:r>
-              <a:rPr sz="3000" b="1" i="0">
+              <a:rPr sz="3000" b="0" i="0">
                 <a:solidFill>
                   <a:srgbClr val="2E3436"/>
                 </a:solidFill>
-                <a:latin typeface="Libre Caslon Display"/>
+                <a:latin typeface="Georgia"/>
               </a:rPr>
               <a:t>Your own result</a:t>
             </a:r>
@@ -14545,7 +13995,7 @@
                 <a:solidFill>
                   <a:srgbClr val="5C6552"/>
                 </a:solidFill>
-                <a:latin typeface="Karla"/>
+                <a:latin typeface="Calibri"/>
               </a:rPr>
               <a:t>On the sheet. Pick one result, the one that bothers you most.</a:t>
             </a:r>
@@ -14675,7 +14125,7 @@
                 <a:solidFill>
                   <a:srgbClr val="FFFDF7"/>
                 </a:solidFill>
-                <a:latin typeface="Karla"/>
+                <a:latin typeface="Calibri"/>
               </a:rPr>
               <a:t>1</a:t>
             </a:r>
@@ -14713,11 +14163,11 @@
               </a:spcAft>
             </a:pPr>
             <a:r>
-              <a:rPr sz="1300" b="1" i="0">
+              <a:rPr sz="1300" b="0" i="0">
                 <a:solidFill>
                   <a:srgbClr val="5A6428"/>
                 </a:solidFill>
-                <a:latin typeface="Libre Caslon Display"/>
+                <a:latin typeface="Georgia"/>
               </a:rPr>
               <a:t>What it tested, and what you did on it</a:t>
             </a:r>
@@ -14759,7 +14209,7 @@
                 <a:solidFill>
                   <a:srgbClr val="5C6552"/>
                 </a:solidFill>
-                <a:latin typeface="Karla"/>
+                <a:latin typeface="Calibri"/>
               </a:rPr>
               <a:t>Where the marks went, if you know. If you do not know, the first move is to find out.</a:t>
             </a:r>
@@ -14889,7 +14339,7 @@
                 <a:solidFill>
                   <a:srgbClr val="FFFDF7"/>
                 </a:solidFill>
-                <a:latin typeface="Karla"/>
+                <a:latin typeface="Calibri"/>
               </a:rPr>
               <a:t>2</a:t>
             </a:r>
@@ -14927,11 +14377,11 @@
               </a:spcAft>
             </a:pPr>
             <a:r>
-              <a:rPr sz="1300" b="1" i="0">
+              <a:rPr sz="1300" b="0" i="0">
                 <a:solidFill>
                   <a:srgbClr val="5A6428"/>
                 </a:solidFill>
-                <a:latin typeface="Libre Caslon Display"/>
+                <a:latin typeface="Georgia"/>
               </a:rPr>
               <a:t>One line of fact</a:t>
             </a:r>
@@ -14973,7 +14423,7 @@
                 <a:solidFill>
                   <a:srgbClr val="5C6552"/>
                 </a:solidFill>
-                <a:latin typeface="Karla"/>
+                <a:latin typeface="Calibri"/>
               </a:rPr>
               <a:t>No always, never or just. If it has one, cross it out and try again.</a:t>
             </a:r>
@@ -15103,7 +14553,7 @@
                 <a:solidFill>
                   <a:srgbClr val="FFFDF7"/>
                 </a:solidFill>
-                <a:latin typeface="Karla"/>
+                <a:latin typeface="Calibri"/>
               </a:rPr>
               <a:t>3</a:t>
             </a:r>
@@ -15141,11 +14591,11 @@
               </a:spcAft>
             </a:pPr>
             <a:r>
-              <a:rPr sz="1300" b="1" i="0">
+              <a:rPr sz="1300" b="0" i="0">
                 <a:solidFill>
                   <a:srgbClr val="5A6428"/>
                 </a:solidFill>
-                <a:latin typeface="Libre Caslon Display"/>
+                <a:latin typeface="Georgia"/>
               </a:rPr>
               <a:t>One first move</a:t>
             </a:r>
@@ -15187,7 +14637,7 @@
                 <a:solidFill>
                   <a:srgbClr val="5C6552"/>
                 </a:solidFill>
-                <a:latin typeface="Karla"/>
+                <a:latin typeface="Calibri"/>
               </a:rPr>
               <a:t>Under an hour, this week, and you could tell someone you had done it.</a:t>
             </a:r>
@@ -15229,7 +14679,7 @@
                 <a:solidFill>
                   <a:srgbClr val="5C6552"/>
                 </a:solidFill>
-                <a:latin typeface="Karla"/>
+                <a:latin typeface="Calibri"/>
               </a:rPr>
               <a:t>Eight minutes. The sheet is yours and it is not collected.</a:t>
             </a:r>
@@ -15295,7 +14745,7 @@
                 <a:solidFill>
                   <a:srgbClr val="8B9179"/>
                 </a:solidFill>
-                <a:latin typeface="Karla"/>
+                <a:latin typeface="Calibri"/>
               </a:rPr>
               <a:t>The Pastoral Guide</a:t>
             </a:r>
@@ -15337,7 +14787,7 @@
                 <a:solidFill>
                   <a:srgbClr val="8B9179"/>
                 </a:solidFill>
-                <a:latin typeface="Karla"/>
+                <a:latin typeface="Calibri"/>
               </a:rPr>
               <a:t>9 / 14</a:t>
             </a:r>

--- a/tutor-time/after-the-mocks/downloads/After_the_Mocks.pptx
+++ b/tutor-time/after-the-mocks/downloads/After_the_Mocks.pptx
@@ -3292,7 +3292,7 @@
                 </a:solidFill>
                 <a:latin typeface="Calibri"/>
               </a:rPr>
-              <a:t>A result is information. The story is optional.</a:t>
+              <a:t>What a result tells you, and what it does not.</a:t>
             </a:r>
           </a:p>
         </p:txBody>
